--- a/generated_ppts/artificial_intelligence_presentation.pptx
+++ b/generated_ppts/artificial_intelligence_presentation.pptx
@@ -11,7 +11,6 @@
     <p:sldId id="259" r:id="rId10"/>
     <p:sldId id="260" r:id="rId11"/>
     <p:sldId id="261" r:id="rId12"/>
-    <p:sldId id="262" r:id="rId13"/>
   </p:sldIdLst>
   <p:sldSz cx="9144000" cy="6858000" type="screen4x3"/>
   <p:notesSz cx="6858000" cy="9144000"/>
@@ -3130,7 +3129,7 @@
                   <a:srgbClr val="FFFFFF"/>
                 </a:solidFill>
               </a:rPr>
-              <a:t>Create  A Ppt Of 6 Artificial Intelligence</a:t>
+              <a:t>"Artificial Intelligence"</a:t>
             </a:r>
           </a:p>
         </p:txBody>
@@ -3206,7 +3205,7 @@
                   <a:srgbClr val="FFFFFF"/>
                 </a:solidFill>
               </a:rPr>
-              <a:t>What Is AI</a:t>
+              <a:t>Machine Learning</a:t>
             </a:r>
           </a:p>
         </p:txBody>
@@ -3239,7 +3238,7 @@
                   <a:srgbClr val="FFFFFF"/>
                 </a:solidFill>
               </a:rPr>
-              <a:t>AI is a subset of computer science that enables machines to think and learn like humans</a:t>
+              <a:t>Machine learning is a type of AI</a:t>
             </a:r>
           </a:p>
           <a:p>
@@ -3256,7 +3255,7 @@
                   <a:srgbClr val="FFFFFF"/>
                 </a:solidFill>
               </a:rPr>
-              <a:t>AI systems use algorithms and data to make decisions and predictions</a:t>
+              <a:t>It enables machines to learn from data</a:t>
             </a:r>
           </a:p>
           <a:p>
@@ -3273,7 +3272,7 @@
                   <a:srgbClr val="FFFFFF"/>
                 </a:solidFill>
               </a:rPr>
-              <a:t>AI has many applications in areas such as healthcare and finance</a:t>
+              <a:t>Used for predictive modeling and analytics</a:t>
             </a:r>
           </a:p>
         </p:txBody>
@@ -3332,7 +3331,7 @@
                   <a:srgbClr val="FFFFFF"/>
                 </a:solidFill>
               </a:rPr>
-              <a:t>Types of Learning</a:t>
+              <a:t>Natural Language</a:t>
             </a:r>
           </a:p>
         </p:txBody>
@@ -3365,7 +3364,7 @@
                   <a:srgbClr val="FFFFFF"/>
                 </a:solidFill>
               </a:rPr>
-              <a:t>Supervised learning trains models using labeled data</a:t>
+              <a:t>Natural Language Processing (NLP) is a subfield of AI</a:t>
             </a:r>
           </a:p>
           <a:p>
@@ -3382,7 +3381,7 @@
                   <a:srgbClr val="FFFFFF"/>
                 </a:solidFill>
               </a:rPr>
-              <a:t>Unsupervised learning trains models using unlabeled data</a:t>
+              <a:t>NLP deals with human-computer interaction in natural language</a:t>
             </a:r>
           </a:p>
           <a:p>
@@ -3399,7 +3398,7 @@
                   <a:srgbClr val="FFFFFF"/>
                 </a:solidFill>
               </a:rPr>
-              <a:t>Reinforcement learning trains models using rewards and penalties</a:t>
+              <a:t>Used for language translation and text analysis</a:t>
             </a:r>
           </a:p>
         </p:txBody>
@@ -3458,7 +3457,7 @@
                   <a:srgbClr val="FFFFFF"/>
                 </a:solidFill>
               </a:rPr>
-              <a:t>Neural Networks</a:t>
+              <a:t>Deep Learning</a:t>
             </a:r>
           </a:p>
         </p:txBody>
@@ -3491,7 +3490,7 @@
                   <a:srgbClr val="FFFFFF"/>
                 </a:solidFill>
               </a:rPr>
-              <a:t>Neural networks are modeled after the human brain</a:t>
+              <a:t>Deep learning is a type of machine learning</a:t>
             </a:r>
           </a:p>
           <a:p>
@@ -3508,7 +3507,7 @@
                   <a:srgbClr val="FFFFFF"/>
                 </a:solidFill>
               </a:rPr>
-              <a:t>Neural networks can learn and improve over time</a:t>
+              <a:t>It uses neural networks to analyze data</a:t>
             </a:r>
           </a:p>
           <a:p>
@@ -3525,7 +3524,7 @@
                   <a:srgbClr val="FFFFFF"/>
                 </a:solidFill>
               </a:rPr>
-              <a:t>Neural networks are used in image and speech recognition</a:t>
+              <a:t>Used for image and speech recognition</a:t>
             </a:r>
           </a:p>
         </p:txBody>
@@ -3584,7 +3583,7 @@
                   <a:srgbClr val="FFFFFF"/>
                 </a:solidFill>
               </a:rPr>
-              <a:t>Real World Applications</a:t>
+              <a:t>Computer Vision</a:t>
             </a:r>
           </a:p>
         </p:txBody>
@@ -3617,7 +3616,7 @@
                   <a:srgbClr val="FFFFFF"/>
                 </a:solidFill>
               </a:rPr>
-              <a:t>AI is used in self-driving cars and robots</a:t>
+              <a:t>Computer vision is a field of AI that deals with visuals</a:t>
             </a:r>
           </a:p>
           <a:p>
@@ -3634,7 +3633,7 @@
                   <a:srgbClr val="FFFFFF"/>
                 </a:solidFill>
               </a:rPr>
-              <a:t>AI is used in virtual assistants such as Siri and Alexa</a:t>
+              <a:t>It enables computers to interpret and understand images</a:t>
             </a:r>
           </a:p>
           <a:p>
@@ -3651,7 +3650,7 @@
                   <a:srgbClr val="FFFFFF"/>
                 </a:solidFill>
               </a:rPr>
-              <a:t>AI is used in medical diagnosis and treatment</a:t>
+              <a:t>Used for object detection and facial recognition</a:t>
             </a:r>
           </a:p>
         </p:txBody>
@@ -3710,7 +3709,7 @@
                   <a:srgbClr val="FFFFFF"/>
                 </a:solidFill>
               </a:rPr>
-              <a:t>Future of AI</a:t>
+              <a:t>AI Applications</a:t>
             </a:r>
           </a:p>
         </p:txBody>
@@ -3743,7 +3742,7 @@
                   <a:srgbClr val="FFFFFF"/>
                 </a:solidFill>
               </a:rPr>
-              <a:t>AI will continue to improve and become more widespread</a:t>
+              <a:t>AI has various applications in healthcare and finance</a:t>
             </a:r>
           </a:p>
           <a:p>
@@ -3760,7 +3759,7 @@
                   <a:srgbClr val="FFFFFF"/>
                 </a:solidFill>
               </a:rPr>
-              <a:t>AI will change the way we work and live</a:t>
+              <a:t>It is used for predictive maintenance and quality control</a:t>
             </a:r>
           </a:p>
           <a:p>
@@ -3777,133 +3776,7 @@
                   <a:srgbClr val="FFFFFF"/>
                 </a:solidFill>
               </a:rPr>
-              <a:t>AI will raise important questions about ethics and responsibility</a:t>
-            </a:r>
-          </a:p>
-        </p:txBody>
-      </p:sp>
-    </p:spTree>
-  </p:cSld>
-  <p:clrMapOvr>
-    <a:masterClrMapping/>
-  </p:clrMapOvr>
-</p:sld>
-</file>
-
-<file path=ppt/slides/slide7.xml><?xml version="1.0" encoding="utf-8"?>
-<p:sld xmlns:a="http://schemas.openxmlformats.org/drawingml/2006/main" xmlns:p="http://schemas.openxmlformats.org/presentationml/2006/main" xmlns:r="http://schemas.openxmlformats.org/officeDocument/2006/relationships">
-  <p:cSld>
-    <p:bg>
-      <p:bgPr>
-        <a:solidFill>
-          <a:srgbClr val="03256C"/>
-        </a:solidFill>
-        <a:effectLst/>
-      </p:bgPr>
-    </p:bg>
-    <p:spTree>
-      <p:nvGrpSpPr>
-        <p:cNvPr id="1" name=""/>
-        <p:cNvGrpSpPr/>
-        <p:nvPr/>
-      </p:nvGrpSpPr>
-      <p:grpSpPr/>
-      <p:sp>
-        <p:nvSpPr>
-          <p:cNvPr id="2" name="Title 1"/>
-          <p:cNvSpPr>
-            <a:spLocks noGrp="1"/>
-          </p:cNvSpPr>
-          <p:nvPr>
-            <p:ph type="title"/>
-          </p:nvPr>
-        </p:nvSpPr>
-        <p:spPr/>
-        <p:txBody>
-          <a:bodyPr/>
-          <a:lstStyle/>
-          <a:p>
-            <a:pPr>
-              <a:defRPr sz="3500" b="1">
-                <a:solidFill>
-                  <a:srgbClr val="FFFFFF"/>
-                </a:solidFill>
-              </a:defRPr>
-            </a:pPr>
-            <a:r>
-              <a:rPr sz="3500" b="1">
-                <a:solidFill>
-                  <a:srgbClr val="FFFFFF"/>
-                </a:solidFill>
-              </a:rPr>
-              <a:t>AI Challenges</a:t>
-            </a:r>
-          </a:p>
-        </p:txBody>
-      </p:sp>
-      <p:sp>
-        <p:nvSpPr>
-          <p:cNvPr id="3" name="Content Placeholder 2"/>
-          <p:cNvSpPr>
-            <a:spLocks noGrp="1"/>
-          </p:cNvSpPr>
-          <p:nvPr>
-            <p:ph idx="1"/>
-          </p:nvPr>
-        </p:nvSpPr>
-        <p:spPr/>
-        <p:txBody>
-          <a:bodyPr/>
-          <a:lstStyle/>
-          <a:p>
-            <a:pPr>
-              <a:defRPr sz="1500" b="0">
-                <a:solidFill>
-                  <a:srgbClr val="FFFFFF"/>
-                </a:solidFill>
-              </a:defRPr>
-            </a:pPr>
-            <a:r>
-              <a:rPr sz="1500" b="0">
-                <a:solidFill>
-                  <a:srgbClr val="FFFFFF"/>
-                </a:solidFill>
-              </a:rPr>
-              <a:t>AI faces challenges such as bias and job displacement</a:t>
-            </a:r>
-          </a:p>
-          <a:p>
-            <a:pPr>
-              <a:defRPr sz="1500" b="0">
-                <a:solidFill>
-                  <a:srgbClr val="FFFFFF"/>
-                </a:solidFill>
-              </a:defRPr>
-            </a:pPr>
-            <a:r>
-              <a:rPr sz="1500" b="0">
-                <a:solidFill>
-                  <a:srgbClr val="FFFFFF"/>
-                </a:solidFill>
-              </a:rPr>
-              <a:t>AI requires large amounts of data and computing power</a:t>
-            </a:r>
-          </a:p>
-          <a:p>
-            <a:pPr>
-              <a:defRPr sz="1500" b="0">
-                <a:solidFill>
-                  <a:srgbClr val="FFFFFF"/>
-                </a:solidFill>
-              </a:defRPr>
-            </a:pPr>
-            <a:r>
-              <a:rPr sz="1500" b="0">
-                <a:solidFill>
-                  <a:srgbClr val="FFFFFF"/>
-                </a:solidFill>
-              </a:rPr>
-              <a:t>AI raises concerns about privacy and security</a:t>
+              <a:t>AI-powered robots are used in manufacturing and logistics</a:t>
             </a:r>
           </a:p>
         </p:txBody>
